--- a/11а клас/РС/7. Свързване на приложения с бази от данни/07. CRUD операции чрез ORM.pptx
+++ b/11а клас/РС/7. Свързване на приложения с бази от данни/07. CRUD операции чрез ORM.pptx
@@ -18,6 +18,8 @@
     <p:sldId id="631" r:id="rId9"/>
     <p:sldId id="632" r:id="rId10"/>
     <p:sldId id="572" r:id="rId11"/>
+    <p:sldId id="634" r:id="rId19"/>
+    <p:sldId id="635" r:id="rId20"/>
   </p:sldIdLst>
   <p:sldSz cx="12192000" cy="6858000"/>
   <p:notesSz cx="6858000" cy="9144000"/>
@@ -1011,7 +1013,9 @@
           <a:bodyPr/>
           <a:lstStyle/>
           <a:p>
-            <a:endParaRPr lang="en-US" dirty="0"/>
+            <a:r>
+              <a:t>При new контекст: MiniORM зарежда всички данни. Въпрос: Кога се свързва с БД?</a:t>
+            </a:r>
           </a:p>
         </p:txBody>
       </p:sp>
@@ -1120,6 +1124,76 @@
         <p14:creationId xmlns:p14="http://schemas.microsoft.com/office/powerpoint/2010/main" val="743553515"/>
       </p:ext>
     </p:extLst>
+  </p:cSld>
+  <p:clrMapOvr>
+    <a:masterClrMapping/>
+  </p:clrMapOvr>
+</p:notes>
+</file>
+
+<file path=ppt/notesSlides/notesSlide10.xml><?xml version="1.0" encoding="utf-8"?>
+<p:notes xmlns:a="http://schemas.openxmlformats.org/drawingml/2006/main" xmlns:p="http://schemas.openxmlformats.org/presentationml/2006/main" xmlns:r="http://schemas.openxmlformats.org/officeDocument/2006/relationships">
+  <p:cSld>
+    <p:spTree>
+      <p:nvGrpSpPr>
+        <p:cNvPr id="1" name=""/>
+        <p:cNvGrpSpPr/>
+        <p:nvPr/>
+      </p:nvGrpSpPr>
+      <p:grpSpPr>
+        <a:xfrm>
+          <a:off x="0" y="0"/>
+          <a:ext cx="0" cy="0"/>
+          <a:chOff x="0" y="0"/>
+          <a:chExt cx="0" cy="0"/>
+        </a:xfrm>
+      </p:grpSpPr>
+      <p:sp>
+        <p:nvSpPr>
+          <p:cNvPr id="2" name="Slide Image Placeholder 1"/>
+          <p:cNvSpPr>
+            <a:spLocks noGrp="1"/>
+          </p:cNvSpPr>
+          <p:nvPr>
+            <p:ph type="sldImg" idx="2"/>
+          </p:nvPr>
+        </p:nvSpPr>
+        <p:spPr/>
+      </p:sp>
+      <p:sp>
+        <p:nvSpPr>
+          <p:cNvPr id="3" name="Notes Placeholder 2"/>
+          <p:cNvSpPr>
+            <a:spLocks noGrp="1"/>
+          </p:cNvSpPr>
+          <p:nvPr>
+            <p:ph type="body" idx="3" sz="quarter"/>
+          </p:nvPr>
+        </p:nvSpPr>
+        <p:spPr/>
+        <p:txBody>
+          <a:bodyPr/>
+          <a:lstStyle/>
+          <a:p>
+            <a:r>
+              <a:t>Покажете реални SQL заявки с SQL Profiler.</a:t>
+            </a:r>
+          </a:p>
+        </p:txBody>
+      </p:sp>
+      <p:sp>
+        <p:nvSpPr>
+          <p:cNvPr id="4" name="Slide Number Placeholder 3"/>
+          <p:cNvSpPr>
+            <a:spLocks noGrp="1"/>
+          </p:cNvSpPr>
+          <p:nvPr>
+            <p:ph type="sldNum" idx="5" sz="quarter"/>
+          </p:nvPr>
+        </p:nvSpPr>
+        <p:spPr/>
+      </p:sp>
+    </p:spTree>
   </p:cSld>
   <p:clrMapOvr>
     <a:masterClrMapping/>
@@ -1171,7 +1245,9 @@
           <a:bodyPr/>
           <a:lstStyle/>
           <a:p>
-            <a:endParaRPr lang="en-US" dirty="0"/>
+            <a:r>
+              <a:t>LINQ → SELECT. Where() → WHERE. ToArray() изпълнява заявката.</a:t>
+            </a:r>
           </a:p>
         </p:txBody>
       </p:sp>
@@ -1280,6 +1356,496 @@
         <p14:creationId xmlns:p14="http://schemas.microsoft.com/office/powerpoint/2010/main" val="1820482935"/>
       </p:ext>
     </p:extLst>
+  </p:cSld>
+  <p:clrMapOvr>
+    <a:masterClrMapping/>
+  </p:clrMapOvr>
+</p:notes>
+</file>
+
+<file path=ppt/notesSlides/notesSlide3.xml><?xml version="1.0" encoding="utf-8"?>
+<p:notes xmlns:a="http://schemas.openxmlformats.org/drawingml/2006/main" xmlns:p="http://schemas.openxmlformats.org/presentationml/2006/main" xmlns:r="http://schemas.openxmlformats.org/officeDocument/2006/relationships">
+  <p:cSld>
+    <p:spTree>
+      <p:nvGrpSpPr>
+        <p:cNvPr id="1" name=""/>
+        <p:cNvGrpSpPr/>
+        <p:nvPr/>
+      </p:nvGrpSpPr>
+      <p:grpSpPr>
+        <a:xfrm>
+          <a:off x="0" y="0"/>
+          <a:ext cx="0" cy="0"/>
+          <a:chOff x="0" y="0"/>
+          <a:chExt cx="0" cy="0"/>
+        </a:xfrm>
+      </p:grpSpPr>
+      <p:sp>
+        <p:nvSpPr>
+          <p:cNvPr id="2" name="Slide Image Placeholder 1"/>
+          <p:cNvSpPr>
+            <a:spLocks noGrp="1"/>
+          </p:cNvSpPr>
+          <p:nvPr>
+            <p:ph type="sldImg" idx="2"/>
+          </p:nvPr>
+        </p:nvSpPr>
+        <p:spPr/>
+      </p:sp>
+      <p:sp>
+        <p:nvSpPr>
+          <p:cNvPr id="3" name="Notes Placeholder 2"/>
+          <p:cNvSpPr>
+            <a:spLocks noGrp="1"/>
+          </p:cNvSpPr>
+          <p:nvPr>
+            <p:ph type="body" idx="3" sz="quarter"/>
+          </p:nvPr>
+        </p:nvSpPr>
+        <p:spPr/>
+        <p:txBody>
+          <a:bodyPr/>
+          <a:lstStyle/>
+          <a:p>
+            <a:r>
+              <a:t>CRUD = Create/Read/Update/Delete. 95% от бизнес логиката.</a:t>
+            </a:r>
+          </a:p>
+        </p:txBody>
+      </p:sp>
+      <p:sp>
+        <p:nvSpPr>
+          <p:cNvPr id="4" name="Slide Number Placeholder 3"/>
+          <p:cNvSpPr>
+            <a:spLocks noGrp="1"/>
+          </p:cNvSpPr>
+          <p:nvPr>
+            <p:ph type="sldNum" idx="5" sz="quarter"/>
+          </p:nvPr>
+        </p:nvSpPr>
+        <p:spPr/>
+      </p:sp>
+    </p:spTree>
+  </p:cSld>
+  <p:clrMapOvr>
+    <a:masterClrMapping/>
+  </p:clrMapOvr>
+</p:notes>
+</file>
+
+<file path=ppt/notesSlides/notesSlide4.xml><?xml version="1.0" encoding="utf-8"?>
+<p:notes xmlns:a="http://schemas.openxmlformats.org/drawingml/2006/main" xmlns:p="http://schemas.openxmlformats.org/presentationml/2006/main" xmlns:r="http://schemas.openxmlformats.org/officeDocument/2006/relationships">
+  <p:cSld>
+    <p:spTree>
+      <p:nvGrpSpPr>
+        <p:cNvPr id="1" name=""/>
+        <p:cNvGrpSpPr/>
+        <p:nvPr/>
+      </p:nvGrpSpPr>
+      <p:grpSpPr>
+        <a:xfrm>
+          <a:off x="0" y="0"/>
+          <a:ext cx="0" cy="0"/>
+          <a:chOff x="0" y="0"/>
+          <a:chExt cx="0" cy="0"/>
+        </a:xfrm>
+      </p:grpSpPr>
+      <p:sp>
+        <p:nvSpPr>
+          <p:cNvPr id="2" name="Slide Image Placeholder 1"/>
+          <p:cNvSpPr>
+            <a:spLocks noGrp="1"/>
+          </p:cNvSpPr>
+          <p:nvPr>
+            <p:ph type="sldImg" idx="2"/>
+          </p:nvPr>
+        </p:nvSpPr>
+        <p:spPr/>
+      </p:sp>
+      <p:sp>
+        <p:nvSpPr>
+          <p:cNvPr id="3" name="Notes Placeholder 2"/>
+          <p:cNvSpPr>
+            <a:spLocks noGrp="1"/>
+          </p:cNvSpPr>
+          <p:nvPr>
+            <p:ph type="body" idx="3" sz="quarter"/>
+          </p:nvPr>
+        </p:nvSpPr>
+        <p:spPr/>
+        <p:txBody>
+          <a:bodyPr/>
+          <a:lstStyle/>
+          <a:p>
+            <a:r>
+              <a:t>CRUD. Въпрос: Кои CRUD операции ползва Facebook?</a:t>
+            </a:r>
+          </a:p>
+        </p:txBody>
+      </p:sp>
+      <p:sp>
+        <p:nvSpPr>
+          <p:cNvPr id="4" name="Slide Number Placeholder 3"/>
+          <p:cNvSpPr>
+            <a:spLocks noGrp="1"/>
+          </p:cNvSpPr>
+          <p:nvPr>
+            <p:ph type="sldNum" idx="5" sz="quarter"/>
+          </p:nvPr>
+        </p:nvSpPr>
+        <p:spPr/>
+      </p:sp>
+    </p:spTree>
+  </p:cSld>
+  <p:clrMapOvr>
+    <a:masterClrMapping/>
+  </p:clrMapOvr>
+</p:notes>
+</file>
+
+<file path=ppt/notesSlides/notesSlide5.xml><?xml version="1.0" encoding="utf-8"?>
+<p:notes xmlns:a="http://schemas.openxmlformats.org/drawingml/2006/main" xmlns:p="http://schemas.openxmlformats.org/presentationml/2006/main" xmlns:r="http://schemas.openxmlformats.org/officeDocument/2006/relationships">
+  <p:cSld>
+    <p:spTree>
+      <p:nvGrpSpPr>
+        <p:cNvPr id="1" name=""/>
+        <p:cNvGrpSpPr/>
+        <p:nvPr/>
+      </p:nvGrpSpPr>
+      <p:grpSpPr>
+        <a:xfrm>
+          <a:off x="0" y="0"/>
+          <a:ext cx="0" cy="0"/>
+          <a:chOff x="0" y="0"/>
+          <a:chExt cx="0" cy="0"/>
+        </a:xfrm>
+      </p:grpSpPr>
+      <p:sp>
+        <p:nvSpPr>
+          <p:cNvPr id="2" name="Slide Image Placeholder 1"/>
+          <p:cNvSpPr>
+            <a:spLocks noGrp="1"/>
+          </p:cNvSpPr>
+          <p:nvPr>
+            <p:ph type="sldImg" idx="2"/>
+          </p:nvPr>
+        </p:nvSpPr>
+        <p:spPr/>
+      </p:sp>
+      <p:sp>
+        <p:nvSpPr>
+          <p:cNvPr id="3" name="Notes Placeholder 2"/>
+          <p:cNvSpPr>
+            <a:spLocks noGrp="1"/>
+          </p:cNvSpPr>
+          <p:nvPr>
+            <p:ph type="body" idx="3" sz="quarter"/>
+          </p:nvPr>
+        </p:nvSpPr>
+        <p:spPr/>
+        <p:txBody>
+          <a:bodyPr/>
+          <a:lstStyle/>
+          <a:p>
+            <a:r>
+              <a:t>Single() vs First(): Single хвърля ако &gt;1. First взима само първия.</a:t>
+            </a:r>
+          </a:p>
+        </p:txBody>
+      </p:sp>
+      <p:sp>
+        <p:nvSpPr>
+          <p:cNvPr id="4" name="Slide Number Placeholder 3"/>
+          <p:cNvSpPr>
+            <a:spLocks noGrp="1"/>
+          </p:cNvSpPr>
+          <p:nvPr>
+            <p:ph type="sldNum" idx="5" sz="quarter"/>
+          </p:nvPr>
+        </p:nvSpPr>
+        <p:spPr/>
+      </p:sp>
+    </p:spTree>
+  </p:cSld>
+  <p:clrMapOvr>
+    <a:masterClrMapping/>
+  </p:clrMapOvr>
+</p:notes>
+</file>
+
+<file path=ppt/notesSlides/notesSlide6.xml><?xml version="1.0" encoding="utf-8"?>
+<p:notes xmlns:a="http://schemas.openxmlformats.org/drawingml/2006/main" xmlns:p="http://schemas.openxmlformats.org/presentationml/2006/main" xmlns:r="http://schemas.openxmlformats.org/officeDocument/2006/relationships">
+  <p:cSld>
+    <p:spTree>
+      <p:nvGrpSpPr>
+        <p:cNvPr id="1" name=""/>
+        <p:cNvGrpSpPr/>
+        <p:nvPr/>
+      </p:nvGrpSpPr>
+      <p:grpSpPr>
+        <a:xfrm>
+          <a:off x="0" y="0"/>
+          <a:ext cx="0" cy="0"/>
+          <a:chOff x="0" y="0"/>
+          <a:chExt cx="0" cy="0"/>
+        </a:xfrm>
+      </p:grpSpPr>
+      <p:sp>
+        <p:nvSpPr>
+          <p:cNvPr id="2" name="Slide Image Placeholder 1"/>
+          <p:cNvSpPr>
+            <a:spLocks noGrp="1"/>
+          </p:cNvSpPr>
+          <p:nvPr>
+            <p:ph type="sldImg" idx="2"/>
+          </p:nvPr>
+        </p:nvSpPr>
+        <p:spPr/>
+      </p:sp>
+      <p:sp>
+        <p:nvSpPr>
+          <p:cNvPr id="3" name="Notes Placeholder 2"/>
+          <p:cNvSpPr>
+            <a:spLocks noGrp="1"/>
+          </p:cNvSpPr>
+          <p:nvPr>
+            <p:ph type="body" idx="3" sz="quarter"/>
+          </p:nvPr>
+        </p:nvSpPr>
+        <p:spPr/>
+        <p:txBody>
+          <a:bodyPr/>
+          <a:lstStyle/>
+          <a:p>
+            <a:r>
+              <a:t>ТОЧНО: Add() само в паметта. ЧЕСТА ГРЕШКА: без SaveChanges() = без запис.</a:t>
+            </a:r>
+          </a:p>
+        </p:txBody>
+      </p:sp>
+      <p:sp>
+        <p:nvSpPr>
+          <p:cNvPr id="4" name="Slide Number Placeholder 3"/>
+          <p:cNvSpPr>
+            <a:spLocks noGrp="1"/>
+          </p:cNvSpPr>
+          <p:nvPr>
+            <p:ph type="sldNum" idx="5" sz="quarter"/>
+          </p:nvPr>
+        </p:nvSpPr>
+        <p:spPr/>
+      </p:sp>
+    </p:spTree>
+  </p:cSld>
+  <p:clrMapOvr>
+    <a:masterClrMapping/>
+  </p:clrMapOvr>
+</p:notes>
+</file>
+
+<file path=ppt/notesSlides/notesSlide7.xml><?xml version="1.0" encoding="utf-8"?>
+<p:notes xmlns:a="http://schemas.openxmlformats.org/drawingml/2006/main" xmlns:p="http://schemas.openxmlformats.org/presentationml/2006/main" xmlns:r="http://schemas.openxmlformats.org/officeDocument/2006/relationships">
+  <p:cSld>
+    <p:spTree>
+      <p:nvGrpSpPr>
+        <p:cNvPr id="1" name=""/>
+        <p:cNvGrpSpPr/>
+        <p:nvPr/>
+      </p:nvGrpSpPr>
+      <p:grpSpPr>
+        <a:xfrm>
+          <a:off x="0" y="0"/>
+          <a:ext cx="0" cy="0"/>
+          <a:chOff x="0" y="0"/>
+          <a:chExt cx="0" cy="0"/>
+        </a:xfrm>
+      </p:grpSpPr>
+      <p:sp>
+        <p:nvSpPr>
+          <p:cNvPr id="2" name="Slide Image Placeholder 1"/>
+          <p:cNvSpPr>
+            <a:spLocks noGrp="1"/>
+          </p:cNvSpPr>
+          <p:nvPr>
+            <p:ph type="sldImg" idx="2"/>
+          </p:nvPr>
+        </p:nvSpPr>
+        <p:spPr/>
+      </p:sp>
+      <p:sp>
+        <p:nvSpPr>
+          <p:cNvPr id="3" name="Notes Placeholder 2"/>
+          <p:cNvSpPr>
+            <a:spLocks noGrp="1"/>
+          </p:cNvSpPr>
+          <p:nvPr>
+            <p:ph type="body" idx="3" sz="quarter"/>
+          </p:nvPr>
+        </p:nvSpPr>
+        <p:spPr/>
+        <p:txBody>
+          <a:bodyPr/>
+          <a:lstStyle/>
+          <a:p>
+            <a:r>
+              <a:t>ChangeTracker засича автоматично. SaveChanges → UPDATE.</a:t>
+            </a:r>
+          </a:p>
+        </p:txBody>
+      </p:sp>
+      <p:sp>
+        <p:nvSpPr>
+          <p:cNvPr id="4" name="Slide Number Placeholder 3"/>
+          <p:cNvSpPr>
+            <a:spLocks noGrp="1"/>
+          </p:cNvSpPr>
+          <p:nvPr>
+            <p:ph type="sldNum" idx="5" sz="quarter"/>
+          </p:nvPr>
+        </p:nvSpPr>
+        <p:spPr/>
+      </p:sp>
+    </p:spTree>
+  </p:cSld>
+  <p:clrMapOvr>
+    <a:masterClrMapping/>
+  </p:clrMapOvr>
+</p:notes>
+</file>
+
+<file path=ppt/notesSlides/notesSlide8.xml><?xml version="1.0" encoding="utf-8"?>
+<p:notes xmlns:a="http://schemas.openxmlformats.org/drawingml/2006/main" xmlns:p="http://schemas.openxmlformats.org/presentationml/2006/main" xmlns:r="http://schemas.openxmlformats.org/officeDocument/2006/relationships">
+  <p:cSld>
+    <p:spTree>
+      <p:nvGrpSpPr>
+        <p:cNvPr id="1" name=""/>
+        <p:cNvGrpSpPr/>
+        <p:nvPr/>
+      </p:nvGrpSpPr>
+      <p:grpSpPr>
+        <a:xfrm>
+          <a:off x="0" y="0"/>
+          <a:ext cx="0" cy="0"/>
+          <a:chOff x="0" y="0"/>
+          <a:chExt cx="0" cy="0"/>
+        </a:xfrm>
+      </p:grpSpPr>
+      <p:sp>
+        <p:nvSpPr>
+          <p:cNvPr id="2" name="Slide Image Placeholder 1"/>
+          <p:cNvSpPr>
+            <a:spLocks noGrp="1"/>
+          </p:cNvSpPr>
+          <p:nvPr>
+            <p:ph type="sldImg" idx="2"/>
+          </p:nvPr>
+        </p:nvSpPr>
+        <p:spPr/>
+      </p:sp>
+      <p:sp>
+        <p:nvSpPr>
+          <p:cNvPr id="3" name="Notes Placeholder 2"/>
+          <p:cNvSpPr>
+            <a:spLocks noGrp="1"/>
+          </p:cNvSpPr>
+          <p:nvPr>
+            <p:ph type="body" idx="3" sz="quarter"/>
+          </p:nvPr>
+        </p:nvSpPr>
+        <p:spPr/>
+        <p:txBody>
+          <a:bodyPr/>
+          <a:lstStyle/>
+          <a:p>
+            <a:r>
+              <a:t>Remove() маркира за изтриване. SaveChanges → DELETE.</a:t>
+            </a:r>
+          </a:p>
+        </p:txBody>
+      </p:sp>
+      <p:sp>
+        <p:nvSpPr>
+          <p:cNvPr id="4" name="Slide Number Placeholder 3"/>
+          <p:cNvSpPr>
+            <a:spLocks noGrp="1"/>
+          </p:cNvSpPr>
+          <p:nvPr>
+            <p:ph type="sldNum" idx="5" sz="quarter"/>
+          </p:nvPr>
+        </p:nvSpPr>
+        <p:spPr/>
+      </p:sp>
+    </p:spTree>
+  </p:cSld>
+  <p:clrMapOvr>
+    <a:masterClrMapping/>
+  </p:clrMapOvr>
+</p:notes>
+</file>
+
+<file path=ppt/notesSlides/notesSlide9.xml><?xml version="1.0" encoding="utf-8"?>
+<p:notes xmlns:a="http://schemas.openxmlformats.org/drawingml/2006/main" xmlns:p="http://schemas.openxmlformats.org/presentationml/2006/main" xmlns:r="http://schemas.openxmlformats.org/officeDocument/2006/relationships">
+  <p:cSld>
+    <p:spTree>
+      <p:nvGrpSpPr>
+        <p:cNvPr id="1" name=""/>
+        <p:cNvGrpSpPr/>
+        <p:nvPr/>
+      </p:nvGrpSpPr>
+      <p:grpSpPr>
+        <a:xfrm>
+          <a:off x="0" y="0"/>
+          <a:ext cx="0" cy="0"/>
+          <a:chOff x="0" y="0"/>
+          <a:chExt cx="0" cy="0"/>
+        </a:xfrm>
+      </p:grpSpPr>
+      <p:sp>
+        <p:nvSpPr>
+          <p:cNvPr id="2" name="Slide Image Placeholder 1"/>
+          <p:cNvSpPr>
+            <a:spLocks noGrp="1"/>
+          </p:cNvSpPr>
+          <p:nvPr>
+            <p:ph type="sldImg" idx="2"/>
+          </p:nvPr>
+        </p:nvSpPr>
+        <p:spPr/>
+      </p:sp>
+      <p:sp>
+        <p:nvSpPr>
+          <p:cNvPr id="3" name="Notes Placeholder 2"/>
+          <p:cNvSpPr>
+            <a:spLocks noGrp="1"/>
+          </p:cNvSpPr>
+          <p:nvPr>
+            <p:ph type="body" idx="3" sz="quarter"/>
+          </p:nvPr>
+        </p:nvSpPr>
+        <p:spPr/>
+        <p:txBody>
+          <a:bodyPr/>
+          <a:lstStyle/>
+          <a:p>
+            <a:r>
+              <a:t>Проверете в SSMS след всяка операция.</a:t>
+            </a:r>
+          </a:p>
+        </p:txBody>
+      </p:sp>
+      <p:sp>
+        <p:nvSpPr>
+          <p:cNvPr id="4" name="Slide Number Placeholder 3"/>
+          <p:cNvSpPr>
+            <a:spLocks noGrp="1"/>
+          </p:cNvSpPr>
+          <p:nvPr>
+            <p:ph type="sldNum" idx="5" sz="quarter"/>
+          </p:nvPr>
+        </p:nvSpPr>
+        <p:spPr/>
+      </p:sp>
+    </p:spTree>
   </p:cSld>
   <p:clrMapOvr>
     <a:masterClrMapping/>
@@ -5110,6 +5676,181 @@
         <p14:creationId xmlns:p14="http://schemas.microsoft.com/office/powerpoint/2010/main" val="1241344677"/>
       </p:ext>
     </p:extLst>
+  </p:cSld>
+  <p:clrMapOvr>
+    <a:masterClrMapping/>
+  </p:clrMapOvr>
+</p:sld>
+</file>
+
+<file path=ppt/slides/slide11.xml><?xml version="1.0" encoding="utf-8"?>
+<p:sld xmlns:a="http://schemas.openxmlformats.org/drawingml/2006/main" xmlns:p="http://schemas.openxmlformats.org/presentationml/2006/main" xmlns:r="http://schemas.openxmlformats.org/officeDocument/2006/relationships">
+  <p:cSld>
+    <p:spTree>
+      <p:nvGrpSpPr>
+        <p:cNvPr id="1" name=""/>
+        <p:cNvGrpSpPr/>
+        <p:nvPr/>
+      </p:nvGrpSpPr>
+      <p:grpSpPr/>
+      <p:sp>
+        <p:nvSpPr>
+          <p:cNvPr id="2" name="Title 1"/>
+          <p:cNvSpPr>
+            <a:spLocks noGrp="1"/>
+          </p:cNvSpPr>
+          <p:nvPr>
+            <p:ph type="title"/>
+          </p:nvPr>
+        </p:nvSpPr>
+        <p:spPr/>
+        <p:txBody>
+          <a:bodyPr/>
+          <a:lstStyle/>
+          <a:p>
+            <a:r>
+              <a:t>CRUD с MiniORM — Пълен пример</a:t>
+            </a:r>
+          </a:p>
+        </p:txBody>
+      </p:sp>
+      <p:sp>
+        <p:nvSpPr>
+          <p:cNvPr id="3" name="Content Placeholder 2"/>
+          <p:cNvSpPr>
+            <a:spLocks noGrp="1"/>
+          </p:cNvSpPr>
+          <p:nvPr>
+            <p:ph idx="1"/>
+          </p:nvPr>
+        </p:nvSpPr>
+        <p:spPr/>
+        <p:txBody>
+          <a:bodyPr/>
+          <a:lstStyle/>
+          <a:p>
+            <a:r>
+              <a:t>var ctx = new ItCareerDbContext(connStr);</a:t>
+            </a:r>
+          </a:p>
+          <a:p>
+            <a:r>
+              <a:t>// CREATE: ctx.Projects.Add(new Project{Name='P1'}); ctx.SaveChanges();</a:t>
+            </a:r>
+          </a:p>
+          <a:p>
+            <a:r>
+              <a:t>// READ: ctx.Employees.Where(e=&gt;e.JobTitle=='Dev').ToList();</a:t>
+            </a:r>
+          </a:p>
+          <a:p>
+            <a:r>
+              <a:t>// UPDATE: ctx.Employees.First().FirstName='New'; ctx.SaveChanges();</a:t>
+            </a:r>
+          </a:p>
+          <a:p>
+            <a:r>
+              <a:t>// DELETE: ctx.Employees.Remove(ctx.Employees.First()); ctx.SaveChanges();</a:t>
+            </a:r>
+          </a:p>
+          <a:p>
+            <a:r>
+              <a:t>Изпищете по 1 програма за всяка CRUD операция</a:t>
+            </a:r>
+          </a:p>
+        </p:txBody>
+      </p:sp>
+    </p:spTree>
+  </p:cSld>
+  <p:clrMapOvr>
+    <a:masterClrMapping/>
+  </p:clrMapOvr>
+</p:sld>
+</file>
+
+<file path=ppt/slides/slide12.xml><?xml version="1.0" encoding="utf-8"?>
+<p:sld xmlns:a="http://schemas.openxmlformats.org/drawingml/2006/main" xmlns:p="http://schemas.openxmlformats.org/presentationml/2006/main" xmlns:r="http://schemas.openxmlformats.org/officeDocument/2006/relationships">
+  <p:cSld>
+    <p:spTree>
+      <p:nvGrpSpPr>
+        <p:cNvPr id="1" name=""/>
+        <p:cNvGrpSpPr/>
+        <p:nvPr/>
+      </p:nvGrpSpPr>
+      <p:grpSpPr/>
+      <p:sp>
+        <p:nvSpPr>
+          <p:cNvPr id="2" name="Title 1"/>
+          <p:cNvSpPr>
+            <a:spLocks noGrp="1"/>
+          </p:cNvSpPr>
+          <p:nvPr>
+            <p:ph type="title"/>
+          </p:nvPr>
+        </p:nvSpPr>
+        <p:spPr/>
+        <p:txBody>
+          <a:bodyPr/>
+          <a:lstStyle/>
+          <a:p>
+            <a:r>
+              <a:t>Зад кулисите — Генериран SQL</a:t>
+            </a:r>
+          </a:p>
+        </p:txBody>
+      </p:sp>
+      <p:sp>
+        <p:nvSpPr>
+          <p:cNvPr id="3" name="Content Placeholder 2"/>
+          <p:cNvSpPr>
+            <a:spLocks noGrp="1"/>
+          </p:cNvSpPr>
+          <p:nvPr>
+            <p:ph idx="1"/>
+          </p:nvPr>
+        </p:nvSpPr>
+        <p:spPr/>
+        <p:txBody>
+          <a:bodyPr/>
+          <a:lstStyle/>
+          <a:p>
+            <a:r>
+              <a:t>context.Employees.Where(e=&gt;e.Age&gt;25) →</a:t>
+            </a:r>
+          </a:p>
+          <a:p>
+            <a:r>
+              <a:t>  SELECT * FROM Employees WHERE Age &gt; 25</a:t>
+            </a:r>
+          </a:p>
+          <a:p>
+            <a:r>
+              <a:t>context.Employees.Add(emp) + SaveChanges() →</a:t>
+            </a:r>
+          </a:p>
+          <a:p>
+            <a:r>
+              <a:t>  INSERT INTO Employees VALUES (@p0, @p1, ...)</a:t>
+            </a:r>
+          </a:p>
+          <a:p>
+            <a:r>
+              <a:t>emp.FirstName = 'New' + SaveChanges() →</a:t>
+            </a:r>
+          </a:p>
+          <a:p>
+            <a:r>
+              <a:t>  UPDATE Employees SET FirstName=@p0 WHERE Id=@id</a:t>
+            </a:r>
+          </a:p>
+          <a:p>
+            <a:r>
+              <a:t>Няма магия - само автоматично генериран SQL</a:t>
+            </a:r>
+          </a:p>
+        </p:txBody>
+      </p:sp>
+    </p:spTree>
   </p:cSld>
   <p:clrMapOvr>
     <a:masterClrMapping/>
